--- a/03-课件PPT/讲次版/第7章-2-讲次 7-2 · 高阶案例深度研究与软件工厂.pptx
+++ b/03-课件PPT/讲次版/第7章-2-讲次 7-2 · 高阶案例深度研究与软件工厂.pptx
@@ -10103,7 +10103,7 @@
                 </a:solidFill>
                 <a:latin typeface="PingFang SC"/>
               </a:rPr>
-              <a:t>PR→CI→合并(GitHub Channel)|四角色职责边界=委托八要素</a:t>
+              <a:t>PR→CI→合并(GitHub Channel)</a:t>
             </a:r>
           </a:p>
         </p:txBody>
@@ -13750,46 +13750,7 @@
       </p:sp>
       <p:sp>
         <p:nvSpPr>
-          <p:cNvPr id="5" name="TextBox 4"/>
-          <p:cNvSpPr txBox="1"/>
-          <p:nvPr/>
-        </p:nvSpPr>
-        <p:spPr>
-          <a:xfrm>
-            <a:off x="9334500" y="0"/>
-            <a:ext cx="2667000" cy="704850"/>
-          </a:xfrm>
-          <a:prstGeom prst="rect">
-            <a:avLst/>
-          </a:prstGeom>
-          <a:noFill/>
-        </p:spPr>
-        <p:txBody>
-          <a:bodyPr wrap="square" anchor="ctr">
-            <a:spAutoFit/>
-          </a:bodyPr>
-          <a:lstStyle/>
-          <a:p>
-            <a:pPr algn="r">
-              <a:lnSpc>
-                <a:spcPct val="100000"/>
-              </a:lnSpc>
-            </a:pPr>
-            <a:r>
-              <a:rPr sz="1100" b="0">
-                <a:solidFill>
-                  <a:srgbClr val="94A3B8"/>
-                </a:solidFill>
-                <a:latin typeface="PingFang SC"/>
-              </a:rPr>
-              <a:t>DevOps 真实集成</a:t>
-            </a:r>
-          </a:p>
-        </p:txBody>
-      </p:sp>
-      <p:sp>
-        <p:nvSpPr>
-          <p:cNvPr id="6" name="Rounded Rectangle 5"/>
+          <p:cNvPr id="5" name="Rounded Rectangle 4"/>
           <p:cNvSpPr/>
           <p:nvPr/>
         </p:nvSpPr>
@@ -13837,7 +13798,7 @@
       </p:sp>
       <p:sp>
         <p:nvSpPr>
-          <p:cNvPr id="7" name="Rectangle 6"/>
+          <p:cNvPr id="6" name="Rectangle 5"/>
           <p:cNvSpPr/>
           <p:nvPr/>
         </p:nvSpPr>
@@ -13881,7 +13842,7 @@
       </p:sp>
       <p:sp>
         <p:nvSpPr>
-          <p:cNvPr id="8" name="Rounded Rectangle 7"/>
+          <p:cNvPr id="7" name="Rounded Rectangle 6"/>
           <p:cNvSpPr/>
           <p:nvPr/>
         </p:nvSpPr>
@@ -13927,7 +13888,7 @@
       </p:sp>
       <p:sp>
         <p:nvSpPr>
-          <p:cNvPr id="9" name="TextBox 8"/>
+          <p:cNvPr id="8" name="TextBox 7"/>
           <p:cNvSpPr txBox="1"/>
           <p:nvPr/>
         </p:nvSpPr>
@@ -13966,7 +13927,7 @@
       </p:sp>
       <p:sp>
         <p:nvSpPr>
-          <p:cNvPr id="10" name="TextBox 9"/>
+          <p:cNvPr id="9" name="TextBox 8"/>
           <p:cNvSpPr txBox="1"/>
           <p:nvPr/>
         </p:nvSpPr>
@@ -14005,7 +13966,7 @@
       </p:sp>
       <p:sp>
         <p:nvSpPr>
-          <p:cNvPr id="11" name="Rounded Rectangle 10"/>
+          <p:cNvPr id="10" name="Rounded Rectangle 9"/>
           <p:cNvSpPr/>
           <p:nvPr/>
         </p:nvSpPr>
@@ -14053,7 +14014,7 @@
       </p:sp>
       <p:sp>
         <p:nvSpPr>
-          <p:cNvPr id="12" name="Rectangle 11"/>
+          <p:cNvPr id="11" name="Rectangle 10"/>
           <p:cNvSpPr/>
           <p:nvPr/>
         </p:nvSpPr>
@@ -14097,7 +14058,7 @@
       </p:sp>
       <p:sp>
         <p:nvSpPr>
-          <p:cNvPr id="13" name="Rounded Rectangle 12"/>
+          <p:cNvPr id="12" name="Rounded Rectangle 11"/>
           <p:cNvSpPr/>
           <p:nvPr/>
         </p:nvSpPr>
@@ -14143,7 +14104,7 @@
       </p:sp>
       <p:sp>
         <p:nvSpPr>
-          <p:cNvPr id="14" name="TextBox 13"/>
+          <p:cNvPr id="13" name="TextBox 12"/>
           <p:cNvSpPr txBox="1"/>
           <p:nvPr/>
         </p:nvSpPr>
@@ -14182,7 +14143,7 @@
       </p:sp>
       <p:sp>
         <p:nvSpPr>
-          <p:cNvPr id="15" name="TextBox 14"/>
+          <p:cNvPr id="14" name="TextBox 13"/>
           <p:cNvSpPr txBox="1"/>
           <p:nvPr/>
         </p:nvSpPr>
@@ -14221,7 +14182,7 @@
       </p:sp>
       <p:cxnSp>
         <p:nvCxnSpPr>
-          <p:cNvPr id="16" name="Connector 15"/>
+          <p:cNvPr id="15" name="Connector 14"/>
           <p:cNvCxnSpPr/>
           <p:nvPr/>
         </p:nvCxnSpPr>
@@ -14256,7 +14217,7 @@
       </p:cxnSp>
       <p:sp>
         <p:nvSpPr>
-          <p:cNvPr id="17" name="Isosceles Triangle 16"/>
+          <p:cNvPr id="16" name="Isosceles Triangle 15"/>
           <p:cNvSpPr/>
           <p:nvPr/>
         </p:nvSpPr>
@@ -14300,7 +14261,7 @@
       </p:sp>
       <p:sp>
         <p:nvSpPr>
-          <p:cNvPr id="18" name="Rounded Rectangle 17"/>
+          <p:cNvPr id="17" name="Rounded Rectangle 16"/>
           <p:cNvSpPr/>
           <p:nvPr/>
         </p:nvSpPr>
@@ -14348,7 +14309,7 @@
       </p:sp>
       <p:sp>
         <p:nvSpPr>
-          <p:cNvPr id="19" name="Rectangle 18"/>
+          <p:cNvPr id="18" name="Rectangle 17"/>
           <p:cNvSpPr/>
           <p:nvPr/>
         </p:nvSpPr>
@@ -14392,7 +14353,7 @@
       </p:sp>
       <p:sp>
         <p:nvSpPr>
-          <p:cNvPr id="20" name="Rounded Rectangle 19"/>
+          <p:cNvPr id="19" name="Rounded Rectangle 18"/>
           <p:cNvSpPr/>
           <p:nvPr/>
         </p:nvSpPr>
@@ -14438,7 +14399,7 @@
       </p:sp>
       <p:sp>
         <p:nvSpPr>
-          <p:cNvPr id="21" name="TextBox 20"/>
+          <p:cNvPr id="20" name="TextBox 19"/>
           <p:cNvSpPr txBox="1"/>
           <p:nvPr/>
         </p:nvSpPr>
@@ -14477,7 +14438,7 @@
       </p:sp>
       <p:sp>
         <p:nvSpPr>
-          <p:cNvPr id="22" name="TextBox 21"/>
+          <p:cNvPr id="21" name="TextBox 20"/>
           <p:cNvSpPr txBox="1"/>
           <p:nvPr/>
         </p:nvSpPr>
@@ -14516,7 +14477,7 @@
       </p:sp>
       <p:cxnSp>
         <p:nvCxnSpPr>
-          <p:cNvPr id="23" name="Connector 22"/>
+          <p:cNvPr id="22" name="Connector 21"/>
           <p:cNvCxnSpPr/>
           <p:nvPr/>
         </p:nvCxnSpPr>
@@ -14551,7 +14512,7 @@
       </p:cxnSp>
       <p:sp>
         <p:nvSpPr>
-          <p:cNvPr id="24" name="Isosceles Triangle 23"/>
+          <p:cNvPr id="23" name="Isosceles Triangle 22"/>
           <p:cNvSpPr/>
           <p:nvPr/>
         </p:nvSpPr>
@@ -14595,7 +14556,7 @@
       </p:sp>
       <p:sp>
         <p:nvSpPr>
-          <p:cNvPr id="25" name="Rounded Rectangle 24"/>
+          <p:cNvPr id="24" name="Rounded Rectangle 23"/>
           <p:cNvSpPr/>
           <p:nvPr/>
         </p:nvSpPr>
@@ -14643,7 +14604,7 @@
       </p:sp>
       <p:sp>
         <p:nvSpPr>
-          <p:cNvPr id="26" name="Rectangle 25"/>
+          <p:cNvPr id="25" name="Rectangle 24"/>
           <p:cNvSpPr/>
           <p:nvPr/>
         </p:nvSpPr>
@@ -14687,7 +14648,7 @@
       </p:sp>
       <p:sp>
         <p:nvSpPr>
-          <p:cNvPr id="27" name="Rounded Rectangle 26"/>
+          <p:cNvPr id="26" name="Rounded Rectangle 25"/>
           <p:cNvSpPr/>
           <p:nvPr/>
         </p:nvSpPr>
@@ -14733,7 +14694,7 @@
       </p:sp>
       <p:sp>
         <p:nvSpPr>
-          <p:cNvPr id="28" name="TextBox 27"/>
+          <p:cNvPr id="27" name="TextBox 26"/>
           <p:cNvSpPr txBox="1"/>
           <p:nvPr/>
         </p:nvSpPr>
@@ -14772,7 +14733,7 @@
       </p:sp>
       <p:sp>
         <p:nvSpPr>
-          <p:cNvPr id="29" name="TextBox 28"/>
+          <p:cNvPr id="28" name="TextBox 27"/>
           <p:cNvSpPr txBox="1"/>
           <p:nvPr/>
         </p:nvSpPr>
@@ -14811,7 +14772,7 @@
       </p:sp>
       <p:cxnSp>
         <p:nvCxnSpPr>
-          <p:cNvPr id="30" name="Connector 29"/>
+          <p:cNvPr id="29" name="Connector 28"/>
           <p:cNvCxnSpPr/>
           <p:nvPr/>
         </p:nvCxnSpPr>
@@ -14846,7 +14807,7 @@
       </p:cxnSp>
       <p:sp>
         <p:nvSpPr>
-          <p:cNvPr id="31" name="Isosceles Triangle 30"/>
+          <p:cNvPr id="30" name="Isosceles Triangle 29"/>
           <p:cNvSpPr/>
           <p:nvPr/>
         </p:nvSpPr>
@@ -14890,7 +14851,7 @@
       </p:sp>
       <p:sp>
         <p:nvSpPr>
-          <p:cNvPr id="32" name="Rounded Rectangle 31"/>
+          <p:cNvPr id="31" name="Rounded Rectangle 30"/>
           <p:cNvSpPr/>
           <p:nvPr/>
         </p:nvSpPr>
@@ -14938,7 +14899,7 @@
       </p:sp>
       <p:sp>
         <p:nvSpPr>
-          <p:cNvPr id="33" name="Rectangle 32"/>
+          <p:cNvPr id="32" name="Rectangle 31"/>
           <p:cNvSpPr/>
           <p:nvPr/>
         </p:nvSpPr>
@@ -14982,7 +14943,7 @@
       </p:sp>
       <p:sp>
         <p:nvSpPr>
-          <p:cNvPr id="34" name="Rounded Rectangle 33"/>
+          <p:cNvPr id="33" name="Rounded Rectangle 32"/>
           <p:cNvSpPr/>
           <p:nvPr/>
         </p:nvSpPr>
@@ -15028,7 +14989,7 @@
       </p:sp>
       <p:sp>
         <p:nvSpPr>
-          <p:cNvPr id="35" name="TextBox 34"/>
+          <p:cNvPr id="34" name="TextBox 33"/>
           <p:cNvSpPr txBox="1"/>
           <p:nvPr/>
         </p:nvSpPr>
@@ -15067,7 +15028,7 @@
       </p:sp>
       <p:sp>
         <p:nvSpPr>
-          <p:cNvPr id="36" name="TextBox 35"/>
+          <p:cNvPr id="35" name="TextBox 34"/>
           <p:cNvSpPr txBox="1"/>
           <p:nvPr/>
         </p:nvSpPr>
@@ -15106,7 +15067,7 @@
       </p:sp>
       <p:cxnSp>
         <p:nvCxnSpPr>
-          <p:cNvPr id="37" name="Connector 36"/>
+          <p:cNvPr id="36" name="Connector 35"/>
           <p:cNvCxnSpPr/>
           <p:nvPr/>
         </p:nvCxnSpPr>
@@ -15141,7 +15102,7 @@
       </p:cxnSp>
       <p:sp>
         <p:nvSpPr>
-          <p:cNvPr id="38" name="Isosceles Triangle 37"/>
+          <p:cNvPr id="37" name="Isosceles Triangle 36"/>
           <p:cNvSpPr/>
           <p:nvPr/>
         </p:nvSpPr>
@@ -15185,7 +15146,7 @@
       </p:sp>
       <p:sp>
         <p:nvSpPr>
-          <p:cNvPr id="39" name="Rounded Rectangle 38"/>
+          <p:cNvPr id="38" name="Rounded Rectangle 37"/>
           <p:cNvSpPr/>
           <p:nvPr/>
         </p:nvSpPr>
@@ -15233,7 +15194,7 @@
       </p:sp>
       <p:sp>
         <p:nvSpPr>
-          <p:cNvPr id="40" name="Rectangle 39"/>
+          <p:cNvPr id="39" name="Rectangle 38"/>
           <p:cNvSpPr/>
           <p:nvPr/>
         </p:nvSpPr>
@@ -15277,7 +15238,7 @@
       </p:sp>
       <p:sp>
         <p:nvSpPr>
-          <p:cNvPr id="41" name="Rounded Rectangle 40"/>
+          <p:cNvPr id="40" name="Rounded Rectangle 39"/>
           <p:cNvSpPr/>
           <p:nvPr/>
         </p:nvSpPr>
@@ -15323,7 +15284,7 @@
       </p:sp>
       <p:sp>
         <p:nvSpPr>
-          <p:cNvPr id="42" name="TextBox 41"/>
+          <p:cNvPr id="41" name="TextBox 40"/>
           <p:cNvSpPr txBox="1"/>
           <p:nvPr/>
         </p:nvSpPr>
@@ -15362,7 +15323,7 @@
       </p:sp>
       <p:sp>
         <p:nvSpPr>
-          <p:cNvPr id="43" name="TextBox 42"/>
+          <p:cNvPr id="42" name="TextBox 41"/>
           <p:cNvSpPr txBox="1"/>
           <p:nvPr/>
         </p:nvSpPr>
@@ -15394,14 +15355,14 @@
                 </a:solidFill>
                 <a:latin typeface="PingFang SC"/>
               </a:rPr>
-              <a:t>delete_branch|DevOps 真实集成</a:t>
+              <a:t>delete_branch</a:t>
             </a:r>
           </a:p>
         </p:txBody>
       </p:sp>
       <p:cxnSp>
         <p:nvCxnSpPr>
-          <p:cNvPr id="44" name="Connector 43"/>
+          <p:cNvPr id="43" name="Connector 42"/>
           <p:cNvCxnSpPr/>
           <p:nvPr/>
         </p:nvCxnSpPr>
@@ -15436,7 +15397,7 @@
       </p:cxnSp>
       <p:sp>
         <p:nvSpPr>
-          <p:cNvPr id="45" name="Isosceles Triangle 44"/>
+          <p:cNvPr id="44" name="Isosceles Triangle 43"/>
           <p:cNvSpPr/>
           <p:nvPr/>
         </p:nvSpPr>
@@ -15480,7 +15441,7 @@
       </p:sp>
       <p:sp>
         <p:nvSpPr>
-          <p:cNvPr id="46" name="Rounded Rectangle 45"/>
+          <p:cNvPr id="45" name="Rounded Rectangle 44"/>
           <p:cNvSpPr/>
           <p:nvPr/>
         </p:nvSpPr>
@@ -15526,7 +15487,7 @@
       </p:sp>
       <p:sp>
         <p:nvSpPr>
-          <p:cNvPr id="47" name="TextBox 46"/>
+          <p:cNvPr id="46" name="TextBox 45"/>
           <p:cNvSpPr txBox="1"/>
           <p:nvPr/>
         </p:nvSpPr>
@@ -15565,7 +15526,7 @@
       </p:sp>
       <p:sp>
         <p:nvSpPr>
-          <p:cNvPr id="48" name="TextBox 47"/>
+          <p:cNvPr id="47" name="TextBox 46"/>
           <p:cNvSpPr txBox="1"/>
           <p:nvPr/>
         </p:nvSpPr>
@@ -15604,7 +15565,7 @@
       </p:sp>
       <p:sp>
         <p:nvSpPr>
-          <p:cNvPr id="49" name="TextBox 48"/>
+          <p:cNvPr id="48" name="TextBox 47"/>
           <p:cNvSpPr txBox="1"/>
           <p:nvPr/>
         </p:nvSpPr>
@@ -19611,53 +19572,14 @@
       </p:sp>
       <p:sp>
         <p:nvSpPr>
-          <p:cNvPr id="5" name="TextBox 4"/>
-          <p:cNvSpPr txBox="1"/>
-          <p:nvPr/>
-        </p:nvSpPr>
-        <p:spPr>
-          <a:xfrm>
-            <a:off x="9334500" y="0"/>
-            <a:ext cx="2667000" cy="704850"/>
-          </a:xfrm>
-          <a:prstGeom prst="rect">
-            <a:avLst/>
-          </a:prstGeom>
-          <a:noFill/>
-        </p:spPr>
-        <p:txBody>
-          <a:bodyPr wrap="square" anchor="ctr">
-            <a:spAutoFit/>
-          </a:bodyPr>
-          <a:lstStyle/>
-          <a:p>
-            <a:pPr algn="r">
-              <a:lnSpc>
-                <a:spcPct val="100000"/>
-              </a:lnSpc>
-            </a:pPr>
-            <a:r>
-              <a:rPr sz="1100" b="0">
-                <a:solidFill>
-                  <a:srgbClr val="94A3B8"/>
-                </a:solidFill>
-                <a:latin typeface="PingFang SC"/>
-              </a:rPr>
-              <a:t>$ await ship_change("工单中心", note, branch, path);branch created: agent/live-verify-20261003;commit 8ed8ffe8 pushed;PR #1 OPEN → MERGED;PR #2 OPEN → MERGED;# 分支→提交→PR→合并 全链路真实 GitHub;# 远端:gh pr list → 2 MERGED|2026-10-03</a:t>
-            </a:r>
-          </a:p>
-        </p:txBody>
-      </p:sp>
-      <p:sp>
-        <p:nvSpPr>
-          <p:cNvPr id="6" name="Rounded Rectangle 5"/>
-          <p:cNvSpPr/>
-          <p:nvPr/>
-        </p:nvSpPr>
-        <p:spPr>
-          <a:xfrm>
-            <a:off x="1333500" y="952500"/>
-            <a:ext cx="9525000" cy="5048250"/>
+          <p:cNvPr id="5" name="Rounded Rectangle 4"/>
+          <p:cNvSpPr/>
+          <p:nvPr/>
+        </p:nvSpPr>
+        <p:spPr>
+          <a:xfrm>
+            <a:off x="1333500" y="1047750"/>
+            <a:ext cx="9525000" cy="3238500"/>
           </a:xfrm>
           <a:prstGeom prst="roundRect">
             <a:avLst>
@@ -19696,13 +19618,13 @@
       </p:sp>
       <p:sp>
         <p:nvSpPr>
-          <p:cNvPr id="7" name="Rectangle 6"/>
-          <p:cNvSpPr/>
-          <p:nvPr/>
-        </p:nvSpPr>
-        <p:spPr>
-          <a:xfrm>
-            <a:off x="1333500" y="952500"/>
+          <p:cNvPr id="6" name="Rectangle 5"/>
+          <p:cNvSpPr/>
+          <p:nvPr/>
+        </p:nvSpPr>
+        <p:spPr>
+          <a:xfrm>
+            <a:off x="1333500" y="1047750"/>
             <a:ext cx="9525000" cy="381000"/>
           </a:xfrm>
           <a:prstGeom prst="rect">
@@ -19740,13 +19662,13 @@
       </p:sp>
       <p:sp>
         <p:nvSpPr>
-          <p:cNvPr id="8" name="Rounded Rectangle 7"/>
-          <p:cNvSpPr/>
-          <p:nvPr/>
-        </p:nvSpPr>
-        <p:spPr>
-          <a:xfrm>
-            <a:off x="1504950" y="1085850"/>
+          <p:cNvPr id="7" name="Rounded Rectangle 6"/>
+          <p:cNvSpPr/>
+          <p:nvPr/>
+        </p:nvSpPr>
+        <p:spPr>
+          <a:xfrm>
+            <a:off x="1504950" y="1181100"/>
             <a:ext cx="123825" cy="123825"/>
           </a:xfrm>
           <a:prstGeom prst="roundRect">
@@ -19786,13 +19708,13 @@
       </p:sp>
       <p:sp>
         <p:nvSpPr>
-          <p:cNvPr id="9" name="Rounded Rectangle 8"/>
-          <p:cNvSpPr/>
-          <p:nvPr/>
-        </p:nvSpPr>
-        <p:spPr>
-          <a:xfrm>
-            <a:off x="1752600" y="1085850"/>
+          <p:cNvPr id="8" name="Rounded Rectangle 7"/>
+          <p:cNvSpPr/>
+          <p:nvPr/>
+        </p:nvSpPr>
+        <p:spPr>
+          <a:xfrm>
+            <a:off x="1752600" y="1181100"/>
             <a:ext cx="123825" cy="123825"/>
           </a:xfrm>
           <a:prstGeom prst="roundRect">
@@ -19832,13 +19754,13 @@
       </p:sp>
       <p:sp>
         <p:nvSpPr>
-          <p:cNvPr id="10" name="Rounded Rectangle 9"/>
-          <p:cNvSpPr/>
-          <p:nvPr/>
-        </p:nvSpPr>
-        <p:spPr>
-          <a:xfrm>
-            <a:off x="2000250" y="1085850"/>
+          <p:cNvPr id="9" name="Rounded Rectangle 8"/>
+          <p:cNvSpPr/>
+          <p:nvPr/>
+        </p:nvSpPr>
+        <p:spPr>
+          <a:xfrm>
+            <a:off x="2000250" y="1181100"/>
             <a:ext cx="123825" cy="123825"/>
           </a:xfrm>
           <a:prstGeom prst="roundRect">
@@ -19878,39 +19800,174 @@
       </p:sp>
       <p:sp>
         <p:nvSpPr>
+          <p:cNvPr id="10" name="TextBox 9"/>
+          <p:cNvSpPr txBox="1"/>
+          <p:nvPr/>
+        </p:nvSpPr>
+        <p:spPr>
+          <a:xfrm>
+            <a:off x="2381250" y="1047750"/>
+            <a:ext cx="8286750" cy="381000"/>
+          </a:xfrm>
+          <a:prstGeom prst="rect">
+            <a:avLst/>
+          </a:prstGeom>
+          <a:noFill/>
+        </p:spPr>
+        <p:txBody>
+          <a:bodyPr wrap="square" anchor="ctr">
+            <a:spAutoFit/>
+          </a:bodyPr>
+          <a:lstStyle/>
+          <a:p>
+            <a:pPr algn="l">
+              <a:lnSpc>
+                <a:spcPct val="100000"/>
+              </a:lnSpc>
+            </a:pPr>
+            <a:r>
+              <a:rPr sz="1100" b="0">
+                <a:solidFill>
+                  <a:srgbClr val="94A3B8"/>
+                </a:solidFill>
+                <a:latin typeface="PingFang SC"/>
+              </a:rPr>
+              <a:t>terminal — 平台实测</a:t>
+            </a:r>
+          </a:p>
+        </p:txBody>
+      </p:sp>
+      <p:sp>
+        <p:nvSpPr>
           <p:cNvPr id="11" name="TextBox 10"/>
           <p:cNvSpPr txBox="1"/>
           <p:nvPr/>
         </p:nvSpPr>
         <p:spPr>
           <a:xfrm>
-            <a:off x="2381250" y="952500"/>
-            <a:ext cx="8286750" cy="381000"/>
-          </a:xfrm>
-          <a:prstGeom prst="rect">
-            <a:avLst/>
-          </a:prstGeom>
-          <a:noFill/>
-        </p:spPr>
-        <p:txBody>
-          <a:bodyPr wrap="square" anchor="ctr">
-            <a:spAutoFit/>
-          </a:bodyPr>
-          <a:lstStyle/>
-          <a:p>
-            <a:pPr algn="l">
-              <a:lnSpc>
-                <a:spcPct val="100000"/>
-              </a:lnSpc>
-            </a:pPr>
-            <a:r>
-              <a:rPr sz="1100" b="0">
+            <a:off x="1562100" y="1581150"/>
+            <a:ext cx="9067800" cy="2571750"/>
+          </a:xfrm>
+          <a:prstGeom prst="rect">
+            <a:avLst/>
+          </a:prstGeom>
+          <a:noFill/>
+        </p:spPr>
+        <p:txBody>
+          <a:bodyPr wrap="square">
+            <a:spAutoFit/>
+          </a:bodyPr>
+          <a:lstStyle/>
+          <a:p>
+            <a:pPr>
+              <a:lnSpc>
+                <a:spcPct val="115000"/>
+              </a:lnSpc>
+            </a:pPr>
+            <a:r>
+              <a:rPr sz="1300" b="1">
+                <a:solidFill>
+                  <a:srgbClr val="34D399"/>
+                </a:solidFill>
+                <a:latin typeface="Menlo"/>
+              </a:rPr>
+              <a:t>$ await ship_change("工单中心", note, branch, path)</a:t>
+            </a:r>
+          </a:p>
+          <a:p>
+            <a:pPr>
+              <a:lnSpc>
+                <a:spcPct val="115000"/>
+              </a:lnSpc>
+            </a:pPr>
+            <a:r>
+              <a:rPr sz="1300">
+                <a:solidFill>
+                  <a:srgbClr val="CBD5E1"/>
+                </a:solidFill>
+                <a:latin typeface="Menlo"/>
+              </a:rPr>
+              <a:t>branch created: agent/live-verify-20261003</a:t>
+            </a:r>
+          </a:p>
+          <a:p>
+            <a:pPr>
+              <a:lnSpc>
+                <a:spcPct val="115000"/>
+              </a:lnSpc>
+            </a:pPr>
+            <a:r>
+              <a:rPr sz="1300">
+                <a:solidFill>
+                  <a:srgbClr val="CBD5E1"/>
+                </a:solidFill>
+                <a:latin typeface="Menlo"/>
+              </a:rPr>
+              <a:t>commit 8ed8ffe8 pushed</a:t>
+            </a:r>
+          </a:p>
+          <a:p>
+            <a:pPr>
+              <a:lnSpc>
+                <a:spcPct val="115000"/>
+              </a:lnSpc>
+            </a:pPr>
+            <a:r>
+              <a:rPr sz="1300">
+                <a:solidFill>
+                  <a:srgbClr val="CBD5E1"/>
+                </a:solidFill>
+                <a:latin typeface="Menlo"/>
+              </a:rPr>
+              <a:t>PR #1 OPEN → MERGED</a:t>
+            </a:r>
+          </a:p>
+          <a:p>
+            <a:pPr>
+              <a:lnSpc>
+                <a:spcPct val="115000"/>
+              </a:lnSpc>
+            </a:pPr>
+            <a:r>
+              <a:rPr sz="1300">
+                <a:solidFill>
+                  <a:srgbClr val="CBD5E1"/>
+                </a:solidFill>
+                <a:latin typeface="Menlo"/>
+              </a:rPr>
+              <a:t>PR #2 OPEN → MERGED</a:t>
+            </a:r>
+          </a:p>
+          <a:p>
+            <a:pPr>
+              <a:lnSpc>
+                <a:spcPct val="115000"/>
+              </a:lnSpc>
+            </a:pPr>
+            <a:r>
+              <a:rPr sz="1300">
                 <a:solidFill>
                   <a:srgbClr val="94A3B8"/>
                 </a:solidFill>
-                <a:latin typeface="PingFang SC"/>
-              </a:rPr>
-              <a:t>terminal — 平台实测</a:t>
+                <a:latin typeface="Menlo"/>
+              </a:rPr>
+              <a:t># 分支→提交→PR→合并 全链路真实 GitHub</a:t>
+            </a:r>
+          </a:p>
+          <a:p>
+            <a:pPr>
+              <a:lnSpc>
+                <a:spcPct val="115000"/>
+              </a:lnSpc>
+            </a:pPr>
+            <a:r>
+              <a:rPr sz="1300">
+                <a:solidFill>
+                  <a:srgbClr val="94A3B8"/>
+                </a:solidFill>
+                <a:latin typeface="Menlo"/>
+              </a:rPr>
+              <a:t># 远端:gh pr list → 2 MERGED</a:t>
             </a:r>
           </a:p>
         </p:txBody>
@@ -19918,141 +19975,6 @@
       <p:sp>
         <p:nvSpPr>
           <p:cNvPr id="12" name="TextBox 11"/>
-          <p:cNvSpPr txBox="1"/>
-          <p:nvPr/>
-        </p:nvSpPr>
-        <p:spPr>
-          <a:xfrm>
-            <a:off x="1562100" y="1485900"/>
-            <a:ext cx="9067800" cy="4381500"/>
-          </a:xfrm>
-          <a:prstGeom prst="rect">
-            <a:avLst/>
-          </a:prstGeom>
-          <a:noFill/>
-        </p:spPr>
-        <p:txBody>
-          <a:bodyPr wrap="square">
-            <a:spAutoFit/>
-          </a:bodyPr>
-          <a:lstStyle/>
-          <a:p>
-            <a:pPr>
-              <a:lnSpc>
-                <a:spcPct val="115000"/>
-              </a:lnSpc>
-            </a:pPr>
-            <a:r>
-              <a:rPr sz="1300" b="1">
-                <a:solidFill>
-                  <a:srgbClr val="34D399"/>
-                </a:solidFill>
-                <a:latin typeface="Menlo"/>
-              </a:rPr>
-              <a:t>$ await ship_change("工单中心", note, branch, path)</a:t>
-            </a:r>
-          </a:p>
-          <a:p>
-            <a:pPr>
-              <a:lnSpc>
-                <a:spcPct val="115000"/>
-              </a:lnSpc>
-            </a:pPr>
-            <a:r>
-              <a:rPr sz="1300">
-                <a:solidFill>
-                  <a:srgbClr val="CBD5E1"/>
-                </a:solidFill>
-                <a:latin typeface="Menlo"/>
-              </a:rPr>
-              <a:t>branch created: agent/live-verify-20261003</a:t>
-            </a:r>
-          </a:p>
-          <a:p>
-            <a:pPr>
-              <a:lnSpc>
-                <a:spcPct val="115000"/>
-              </a:lnSpc>
-            </a:pPr>
-            <a:r>
-              <a:rPr sz="1300">
-                <a:solidFill>
-                  <a:srgbClr val="CBD5E1"/>
-                </a:solidFill>
-                <a:latin typeface="Menlo"/>
-              </a:rPr>
-              <a:t>commit 8ed8ffe8 pushed</a:t>
-            </a:r>
-          </a:p>
-          <a:p>
-            <a:pPr>
-              <a:lnSpc>
-                <a:spcPct val="115000"/>
-              </a:lnSpc>
-            </a:pPr>
-            <a:r>
-              <a:rPr sz="1300">
-                <a:solidFill>
-                  <a:srgbClr val="CBD5E1"/>
-                </a:solidFill>
-                <a:latin typeface="Menlo"/>
-              </a:rPr>
-              <a:t>PR #1 OPEN → MERGED</a:t>
-            </a:r>
-          </a:p>
-          <a:p>
-            <a:pPr>
-              <a:lnSpc>
-                <a:spcPct val="115000"/>
-              </a:lnSpc>
-            </a:pPr>
-            <a:r>
-              <a:rPr sz="1300">
-                <a:solidFill>
-                  <a:srgbClr val="CBD5E1"/>
-                </a:solidFill>
-                <a:latin typeface="Menlo"/>
-              </a:rPr>
-              <a:t>PR #2 OPEN → MERGED</a:t>
-            </a:r>
-          </a:p>
-          <a:p>
-            <a:pPr>
-              <a:lnSpc>
-                <a:spcPct val="115000"/>
-              </a:lnSpc>
-            </a:pPr>
-            <a:r>
-              <a:rPr sz="1300">
-                <a:solidFill>
-                  <a:srgbClr val="94A3B8"/>
-                </a:solidFill>
-                <a:latin typeface="Menlo"/>
-              </a:rPr>
-              <a:t># 分支→提交→PR→合并 全链路真实 GitHub</a:t>
-            </a:r>
-          </a:p>
-          <a:p>
-            <a:pPr>
-              <a:lnSpc>
-                <a:spcPct val="115000"/>
-              </a:lnSpc>
-            </a:pPr>
-            <a:r>
-              <a:rPr sz="1300">
-                <a:solidFill>
-                  <a:srgbClr val="94A3B8"/>
-                </a:solidFill>
-                <a:latin typeface="Menlo"/>
-              </a:rPr>
-              <a:t># 远端:gh pr list → 2 MERGED</a:t>
-            </a:r>
-          </a:p>
-        </p:txBody>
-      </p:sp>
-      <p:sp>
-        <p:nvSpPr>
-          <p:cNvPr id="13" name="TextBox 12"/>
           <p:cNvSpPr txBox="1"/>
           <p:nvPr/>
         </p:nvSpPr>
@@ -20091,7 +20013,7 @@
       </p:sp>
       <p:sp>
         <p:nvSpPr>
-          <p:cNvPr id="14" name="TextBox 13"/>
+          <p:cNvPr id="13" name="TextBox 12"/>
           <p:cNvSpPr txBox="1"/>
           <p:nvPr/>
         </p:nvSpPr>
@@ -27128,46 +27050,7 @@
       </p:sp>
       <p:sp>
         <p:nvSpPr>
-          <p:cNvPr id="5" name="TextBox 4"/>
-          <p:cNvSpPr txBox="1"/>
-          <p:nvPr/>
-        </p:nvSpPr>
-        <p:spPr>
-          <a:xfrm>
-            <a:off x="9334500" y="0"/>
-            <a:ext cx="2667000" cy="704850"/>
-          </a:xfrm>
-          <a:prstGeom prst="rect">
-            <a:avLst/>
-          </a:prstGeom>
-          <a:noFill/>
-        </p:spPr>
-        <p:txBody>
-          <a:bodyPr wrap="square" anchor="ctr">
-            <a:spAutoFit/>
-          </a:bodyPr>
-          <a:lstStyle/>
-          <a:p>
-            <a:pPr algn="r">
-              <a:lnSpc>
-                <a:spcPct val="100000"/>
-              </a:lnSpc>
-            </a:pPr>
-            <a:r>
-              <a:rPr sz="1100" b="0">
-                <a:solidFill>
-                  <a:srgbClr val="94A3B8"/>
-                </a:solidFill>
-                <a:latin typeface="PingFang SC"/>
-              </a:rPr>
-              <a:t>90%^门槛^引用准确率;2^源^最低独立证据;8^倍^效率提升实测|不达标阻断发布</a:t>
-            </a:r>
-          </a:p>
-        </p:txBody>
-      </p:sp>
-      <p:sp>
-        <p:nvSpPr>
-          <p:cNvPr id="6" name="Rounded Rectangle 5"/>
+          <p:cNvPr id="5" name="Rounded Rectangle 4"/>
           <p:cNvSpPr/>
           <p:nvPr/>
         </p:nvSpPr>
@@ -27215,7 +27098,7 @@
       </p:sp>
       <p:sp>
         <p:nvSpPr>
-          <p:cNvPr id="7" name="Rectangle 6"/>
+          <p:cNvPr id="6" name="Rectangle 5"/>
           <p:cNvSpPr/>
           <p:nvPr/>
         </p:nvSpPr>
@@ -27259,7 +27142,7 @@
       </p:sp>
       <p:sp>
         <p:nvSpPr>
-          <p:cNvPr id="8" name="TextBox 7"/>
+          <p:cNvPr id="7" name="TextBox 6"/>
           <p:cNvSpPr txBox="1"/>
           <p:nvPr/>
         </p:nvSpPr>
@@ -27298,7 +27181,7 @@
       </p:sp>
       <p:sp>
         <p:nvSpPr>
-          <p:cNvPr id="9" name="TextBox 8"/>
+          <p:cNvPr id="8" name="TextBox 7"/>
           <p:cNvSpPr txBox="1"/>
           <p:nvPr/>
         </p:nvSpPr>
@@ -27337,7 +27220,7 @@
       </p:sp>
       <p:sp>
         <p:nvSpPr>
-          <p:cNvPr id="10" name="TextBox 9"/>
+          <p:cNvPr id="9" name="TextBox 8"/>
           <p:cNvSpPr txBox="1"/>
           <p:nvPr/>
         </p:nvSpPr>
@@ -27376,7 +27259,7 @@
       </p:sp>
       <p:sp>
         <p:nvSpPr>
-          <p:cNvPr id="11" name="Rounded Rectangle 10"/>
+          <p:cNvPr id="10" name="Rounded Rectangle 9"/>
           <p:cNvSpPr/>
           <p:nvPr/>
         </p:nvSpPr>
@@ -27424,7 +27307,7 @@
       </p:sp>
       <p:sp>
         <p:nvSpPr>
-          <p:cNvPr id="12" name="Rectangle 11"/>
+          <p:cNvPr id="11" name="Rectangle 10"/>
           <p:cNvSpPr/>
           <p:nvPr/>
         </p:nvSpPr>
@@ -27468,7 +27351,7 @@
       </p:sp>
       <p:sp>
         <p:nvSpPr>
-          <p:cNvPr id="13" name="TextBox 12"/>
+          <p:cNvPr id="12" name="TextBox 11"/>
           <p:cNvSpPr txBox="1"/>
           <p:nvPr/>
         </p:nvSpPr>
@@ -27507,7 +27390,7 @@
       </p:sp>
       <p:sp>
         <p:nvSpPr>
-          <p:cNvPr id="14" name="TextBox 13"/>
+          <p:cNvPr id="13" name="TextBox 12"/>
           <p:cNvSpPr txBox="1"/>
           <p:nvPr/>
         </p:nvSpPr>
@@ -27546,7 +27429,7 @@
       </p:sp>
       <p:sp>
         <p:nvSpPr>
-          <p:cNvPr id="15" name="TextBox 14"/>
+          <p:cNvPr id="14" name="TextBox 13"/>
           <p:cNvSpPr txBox="1"/>
           <p:nvPr/>
         </p:nvSpPr>
@@ -27585,7 +27468,7 @@
       </p:sp>
       <p:sp>
         <p:nvSpPr>
-          <p:cNvPr id="16" name="Rounded Rectangle 15"/>
+          <p:cNvPr id="15" name="Rounded Rectangle 14"/>
           <p:cNvSpPr/>
           <p:nvPr/>
         </p:nvSpPr>
@@ -27633,7 +27516,7 @@
       </p:sp>
       <p:sp>
         <p:nvSpPr>
-          <p:cNvPr id="17" name="Rectangle 16"/>
+          <p:cNvPr id="16" name="Rectangle 15"/>
           <p:cNvSpPr/>
           <p:nvPr/>
         </p:nvSpPr>
@@ -27677,7 +27560,7 @@
       </p:sp>
       <p:sp>
         <p:nvSpPr>
-          <p:cNvPr id="18" name="TextBox 17"/>
+          <p:cNvPr id="17" name="TextBox 16"/>
           <p:cNvSpPr txBox="1"/>
           <p:nvPr/>
         </p:nvSpPr>
@@ -27716,7 +27599,7 @@
       </p:sp>
       <p:sp>
         <p:nvSpPr>
-          <p:cNvPr id="19" name="TextBox 18"/>
+          <p:cNvPr id="18" name="TextBox 17"/>
           <p:cNvSpPr txBox="1"/>
           <p:nvPr/>
         </p:nvSpPr>
@@ -27755,7 +27638,7 @@
       </p:sp>
       <p:sp>
         <p:nvSpPr>
-          <p:cNvPr id="20" name="TextBox 19"/>
+          <p:cNvPr id="19" name="TextBox 18"/>
           <p:cNvSpPr txBox="1"/>
           <p:nvPr/>
         </p:nvSpPr>
@@ -27787,14 +27670,14 @@
                 </a:solidFill>
                 <a:latin typeface="PingFang SC"/>
               </a:rPr>
-              <a:t>效率提升实测|不达标阻断发布</a:t>
-            </a:r>
-          </a:p>
-        </p:txBody>
-      </p:sp>
-      <p:sp>
-        <p:nvSpPr>
-          <p:cNvPr id="21" name="TextBox 20"/>
+              <a:t>效率提升实测</a:t>
+            </a:r>
+          </a:p>
+        </p:txBody>
+      </p:sp>
+      <p:sp>
+        <p:nvSpPr>
+          <p:cNvPr id="20" name="TextBox 19"/>
           <p:cNvSpPr txBox="1"/>
           <p:nvPr/>
         </p:nvSpPr>
@@ -27833,7 +27716,7 @@
       </p:sp>
       <p:sp>
         <p:nvSpPr>
-          <p:cNvPr id="22" name="TextBox 21"/>
+          <p:cNvPr id="21" name="TextBox 20"/>
           <p:cNvSpPr txBox="1"/>
           <p:nvPr/>
         </p:nvSpPr>
@@ -30588,7 +30471,7 @@
                 </a:solidFill>
                 <a:latin typeface="PingFang SC"/>
               </a:rPr>
-              <a:t>Flag 已配|把 Agent 当新同事管</a:t>
+              <a:t>Flag 已配</a:t>
             </a:r>
           </a:p>
         </p:txBody>
@@ -35626,8 +35509,8 @@
         </p:blipFill>
         <p:spPr>
           <a:xfrm>
-            <a:off x="1026566" y="762000"/>
-            <a:ext cx="10138867" cy="5760720"/>
+            <a:off x="1313515" y="762000"/>
+            <a:ext cx="9564969" cy="5760720"/>
           </a:xfrm>
           <a:prstGeom prst="rect">
             <a:avLst/>
@@ -36833,7 +36716,7 @@
                 </a:solidFill>
                 <a:latin typeface="PingFang SC"/>
               </a:rPr>
-              <a:t>本课 Capstone A=同类 MVP|差异化</a:t>
+              <a:t>本课 Capstone A=同类 MVP</a:t>
             </a:r>
           </a:p>
         </p:txBody>
@@ -36872,7 +36755,7 @@
                 </a:solidFill>
                 <a:latin typeface="PingFang SC"/>
               </a:rPr>
-              <a:t>证据链+可审计</a:t>
+              <a:t/>
             </a:r>
           </a:p>
         </p:txBody>
@@ -37102,46 +36985,7 @@
       </p:sp>
       <p:sp>
         <p:nvSpPr>
-          <p:cNvPr id="5" name="TextBox 4"/>
-          <p:cNvSpPr txBox="1"/>
-          <p:nvPr/>
-        </p:nvSpPr>
-        <p:spPr>
-          <a:xfrm>
-            <a:off x="9334500" y="0"/>
-            <a:ext cx="2667000" cy="704850"/>
-          </a:xfrm>
-          <a:prstGeom prst="rect">
-            <a:avLst/>
-          </a:prstGeom>
-          <a:noFill/>
-        </p:spPr>
-        <p:txBody>
-          <a:bodyPr wrap="square" anchor="ctr">
-            <a:spAutoFit/>
-          </a:bodyPr>
-          <a:lstStyle/>
-          <a:p>
-            <a:pPr algn="r">
-              <a:lnSpc>
-                <a:spcPct val="100000"/>
-              </a:lnSpc>
-            </a:pPr>
-            <a:r>
-              <a:rPr sz="1100" b="0">
-                <a:solidFill>
-                  <a:srgbClr val="94A3B8"/>
-                </a:solidFill>
-                <a:latin typeface="PingFang SC"/>
-              </a:rPr>
-              <a:t>examples/capstone/deep_research 已可运行</a:t>
-            </a:r>
-          </a:p>
-        </p:txBody>
-      </p:sp>
-      <p:sp>
-        <p:nvSpPr>
-          <p:cNvPr id="6" name="Rounded Rectangle 5"/>
+          <p:cNvPr id="5" name="Rounded Rectangle 4"/>
           <p:cNvSpPr/>
           <p:nvPr/>
         </p:nvSpPr>
@@ -37187,6 +37031,45 @@
       </p:sp>
       <p:sp>
         <p:nvSpPr>
+          <p:cNvPr id="6" name="TextBox 5"/>
+          <p:cNvSpPr txBox="1"/>
+          <p:nvPr/>
+        </p:nvSpPr>
+        <p:spPr>
+          <a:xfrm>
+            <a:off x="1962150" y="685800"/>
+            <a:ext cx="1905000" cy="209550"/>
+          </a:xfrm>
+          <a:prstGeom prst="rect">
+            <a:avLst/>
+          </a:prstGeom>
+          <a:noFill/>
+        </p:spPr>
+        <p:txBody>
+          <a:bodyPr wrap="square" anchor="ctr">
+            <a:spAutoFit/>
+          </a:bodyPr>
+          <a:lstStyle/>
+          <a:p>
+            <a:pPr algn="l">
+              <a:lnSpc>
+                <a:spcPct val="100000"/>
+              </a:lnSpc>
+            </a:pPr>
+            <a:r>
+              <a:rPr sz="1100" b="1">
+                <a:solidFill>
+                  <a:srgbClr val="2563EB"/>
+                </a:solidFill>
+                <a:latin typeface="PingFang SC"/>
+              </a:rPr>
+              <a:t>L1</a:t>
+            </a:r>
+          </a:p>
+        </p:txBody>
+      </p:sp>
+      <p:sp>
+        <p:nvSpPr>
           <p:cNvPr id="7" name="Rounded Rectangle 6"/>
           <p:cNvSpPr/>
           <p:nvPr/>
@@ -37285,29 +37168,29 @@
         </p:nvSpPr>
         <p:spPr>
           <a:xfrm>
-            <a:off x="2038350" y="952500"/>
-            <a:ext cx="8534400" cy="1023937"/>
-          </a:xfrm>
-          <a:prstGeom prst="rect">
-            <a:avLst/>
-          </a:prstGeom>
-          <a:noFill/>
-        </p:spPr>
-        <p:txBody>
-          <a:bodyPr wrap="square" anchor="ctr">
+            <a:off x="2057400" y="952500"/>
+            <a:ext cx="8496300" cy="1023937"/>
+          </a:xfrm>
+          <a:prstGeom prst="rect">
+            <a:avLst/>
+          </a:prstGeom>
+          <a:noFill/>
+        </p:spPr>
+        <p:txBody>
+          <a:bodyPr wrap="none" anchor="ctr">
             <a:spAutoFit/>
           </a:bodyPr>
           <a:lstStyle/>
           <a:p>
             <a:pPr algn="l">
               <a:lnSpc>
-                <a:spcPct val="100000"/>
-              </a:lnSpc>
-            </a:pPr>
-            <a:r>
-              <a:rPr sz="1200" b="1">
-                <a:solidFill>
-                  <a:srgbClr val="475569"/>
+                <a:spcPct val="115000"/>
+              </a:lnSpc>
+            </a:pPr>
+            <a:r>
+              <a:rPr sz="1100" b="1">
+                <a:solidFill>
+                  <a:srgbClr val="0B1D3A"/>
                 </a:solidFill>
                 <a:latin typeface="PingFang SC"/>
               </a:rPr>
@@ -37330,9 +37213,9 @@
           <a:prstGeom prst="line">
             <a:avLst/>
           </a:prstGeom>
-          <a:ln w="15240">
+          <a:ln w="17780">
             <a:solidFill>
-              <a:srgbClr val="94A3B8"/>
+              <a:srgbClr val="475569"/>
             </a:solidFill>
           </a:ln>
         </p:spPr>
@@ -37366,7 +37249,7 @@
             <a:avLst/>
           </a:prstGeom>
           <a:solidFill>
-            <a:srgbClr val="94A3B8"/>
+            <a:srgbClr val="475569"/>
           </a:solidFill>
           <a:ln>
             <a:noFill/>
@@ -37397,53 +37280,14 @@
       </p:sp>
       <p:sp>
         <p:nvSpPr>
-          <p:cNvPr id="12" name="TextBox 11"/>
-          <p:cNvSpPr txBox="1"/>
-          <p:nvPr/>
-        </p:nvSpPr>
-        <p:spPr>
-          <a:xfrm>
-            <a:off x="6248400" y="1976437"/>
-            <a:ext cx="2095500" cy="247650"/>
-          </a:xfrm>
-          <a:prstGeom prst="rect">
-            <a:avLst/>
-          </a:prstGeom>
-          <a:noFill/>
-        </p:spPr>
-        <p:txBody>
-          <a:bodyPr wrap="square" anchor="ctr">
-            <a:spAutoFit/>
-          </a:bodyPr>
-          <a:lstStyle/>
-          <a:p>
-            <a:pPr algn="l">
-              <a:lnSpc>
-                <a:spcPct val="100000"/>
-              </a:lnSpc>
-            </a:pPr>
-            <a:r>
-              <a:rPr sz="1000" b="0">
-                <a:solidFill>
-                  <a:srgbClr val="94A3B8"/>
-                </a:solidFill>
-                <a:latin typeface="PingFang SC"/>
-              </a:rPr>
-              <a:t>拆解</a:t>
-            </a:r>
-          </a:p>
-        </p:txBody>
-      </p:sp>
-      <p:sp>
-        <p:nvSpPr>
-          <p:cNvPr id="13" name="Rounded Rectangle 12"/>
-          <p:cNvSpPr/>
-          <p:nvPr/>
-        </p:nvSpPr>
-        <p:spPr>
-          <a:xfrm>
-            <a:off x="1847850" y="2185987"/>
-            <a:ext cx="8877300" cy="1100137"/>
+          <p:cNvPr id="12" name="Rounded Rectangle 11"/>
+          <p:cNvSpPr/>
+          <p:nvPr/>
+        </p:nvSpPr>
+        <p:spPr>
+          <a:xfrm>
+            <a:off x="5743575" y="2014537"/>
+            <a:ext cx="704850" cy="171450"/>
           </a:xfrm>
           <a:prstGeom prst="roundRect">
             <a:avLst>
@@ -37451,32 +37295,73 @@
             </a:avLst>
           </a:prstGeom>
           <a:solidFill>
-            <a:srgbClr val="F1F5F9"/>
-          </a:solidFill>
-          <a:ln>
-            <a:noFill/>
-          </a:ln>
-          <a:effectLst/>
-        </p:spPr>
-        <p:style>
-          <a:lnRef idx="1">
-            <a:schemeClr val="accent1"/>
-          </a:lnRef>
-          <a:fillRef idx="3">
-            <a:schemeClr val="accent1"/>
-          </a:fillRef>
-          <a:effectRef idx="2">
-            <a:schemeClr val="accent1"/>
-          </a:effectRef>
-          <a:fontRef idx="minor">
-            <a:schemeClr val="lt1"/>
-          </a:fontRef>
-        </p:style>
-        <p:txBody>
-          <a:bodyPr rtlCol="0" anchor="ctr"/>
-          <a:lstStyle/>
-          <a:p>
-            <a:pPr algn="ctr"/>
+            <a:srgbClr val="FFFFFF"/>
+          </a:solidFill>
+          <a:ln w="12700">
+            <a:solidFill>
+              <a:srgbClr val="DDE5EE"/>
+            </a:solidFill>
+          </a:ln>
+          <a:effectLst/>
+        </p:spPr>
+        <p:style>
+          <a:lnRef idx="1">
+            <a:schemeClr val="accent1"/>
+          </a:lnRef>
+          <a:fillRef idx="3">
+            <a:schemeClr val="accent1"/>
+          </a:fillRef>
+          <a:effectRef idx="2">
+            <a:schemeClr val="accent1"/>
+          </a:effectRef>
+          <a:fontRef idx="minor">
+            <a:schemeClr val="lt1"/>
+          </a:fontRef>
+        </p:style>
+        <p:txBody>
+          <a:bodyPr rtlCol="0" anchor="ctr"/>
+          <a:lstStyle/>
+          <a:p>
+            <a:pPr algn="ctr"/>
+          </a:p>
+        </p:txBody>
+      </p:sp>
+      <p:sp>
+        <p:nvSpPr>
+          <p:cNvPr id="13" name="TextBox 12"/>
+          <p:cNvSpPr txBox="1"/>
+          <p:nvPr/>
+        </p:nvSpPr>
+        <p:spPr>
+          <a:xfrm>
+            <a:off x="5743575" y="2014537"/>
+            <a:ext cx="704850" cy="171450"/>
+          </a:xfrm>
+          <a:prstGeom prst="rect">
+            <a:avLst/>
+          </a:prstGeom>
+          <a:noFill/>
+        </p:spPr>
+        <p:txBody>
+          <a:bodyPr wrap="square" anchor="ctr">
+            <a:spAutoFit/>
+          </a:bodyPr>
+          <a:lstStyle/>
+          <a:p>
+            <a:pPr algn="ctr">
+              <a:lnSpc>
+                <a:spcPct val="100000"/>
+              </a:lnSpc>
+            </a:pPr>
+            <a:r>
+              <a:rPr sz="1100" b="1">
+                <a:solidFill>
+                  <a:srgbClr val="0B1D3A"/>
+                </a:solidFill>
+                <a:latin typeface="PingFang SC"/>
+              </a:rPr>
+              <a:t>拆解</a:t>
+            </a:r>
           </a:p>
         </p:txBody>
       </p:sp>
@@ -37488,8 +37373,8 @@
         </p:nvSpPr>
         <p:spPr>
           <a:xfrm>
-            <a:off x="1905000" y="2224087"/>
-            <a:ext cx="8763000" cy="1023937"/>
+            <a:off x="1847850" y="2185987"/>
+            <a:ext cx="8877300" cy="1100137"/>
           </a:xfrm>
           <a:prstGeom prst="roundRect">
             <a:avLst>
@@ -37497,6 +37382,91 @@
             </a:avLst>
           </a:prstGeom>
           <a:solidFill>
+            <a:srgbClr val="F1F5F9"/>
+          </a:solidFill>
+          <a:ln>
+            <a:noFill/>
+          </a:ln>
+          <a:effectLst/>
+        </p:spPr>
+        <p:style>
+          <a:lnRef idx="1">
+            <a:schemeClr val="accent1"/>
+          </a:lnRef>
+          <a:fillRef idx="3">
+            <a:schemeClr val="accent1"/>
+          </a:fillRef>
+          <a:effectRef idx="2">
+            <a:schemeClr val="accent1"/>
+          </a:effectRef>
+          <a:fontRef idx="minor">
+            <a:schemeClr val="lt1"/>
+          </a:fontRef>
+        </p:style>
+        <p:txBody>
+          <a:bodyPr rtlCol="0" anchor="ctr"/>
+          <a:lstStyle/>
+          <a:p>
+            <a:pPr algn="ctr"/>
+          </a:p>
+        </p:txBody>
+      </p:sp>
+      <p:sp>
+        <p:nvSpPr>
+          <p:cNvPr id="15" name="TextBox 14"/>
+          <p:cNvSpPr txBox="1"/>
+          <p:nvPr/>
+        </p:nvSpPr>
+        <p:spPr>
+          <a:xfrm>
+            <a:off x="1962150" y="1957387"/>
+            <a:ext cx="1905000" cy="209550"/>
+          </a:xfrm>
+          <a:prstGeom prst="rect">
+            <a:avLst/>
+          </a:prstGeom>
+          <a:noFill/>
+        </p:spPr>
+        <p:txBody>
+          <a:bodyPr wrap="square" anchor="ctr">
+            <a:spAutoFit/>
+          </a:bodyPr>
+          <a:lstStyle/>
+          <a:p>
+            <a:pPr algn="l">
+              <a:lnSpc>
+                <a:spcPct val="100000"/>
+              </a:lnSpc>
+            </a:pPr>
+            <a:r>
+              <a:rPr sz="1100" b="1">
+                <a:solidFill>
+                  <a:srgbClr val="14B8A6"/>
+                </a:solidFill>
+                <a:latin typeface="PingFang SC"/>
+              </a:rPr>
+              <a:t>L2</a:t>
+            </a:r>
+          </a:p>
+        </p:txBody>
+      </p:sp>
+      <p:sp>
+        <p:nvSpPr>
+          <p:cNvPr id="16" name="Rounded Rectangle 15"/>
+          <p:cNvSpPr/>
+          <p:nvPr/>
+        </p:nvSpPr>
+        <p:spPr>
+          <a:xfrm>
+            <a:off x="1905000" y="2224087"/>
+            <a:ext cx="8763000" cy="1023937"/>
+          </a:xfrm>
+          <a:prstGeom prst="roundRect">
+            <a:avLst>
+              <a:gd name="adj" fmla="val 8000"/>
+            </a:avLst>
+          </a:prstGeom>
+          <a:solidFill>
             <a:srgbClr val="FFFFFF"/>
           </a:solidFill>
           <a:ln w="12700">
@@ -37530,7 +37500,7 @@
       </p:sp>
       <p:sp>
         <p:nvSpPr>
-          <p:cNvPr id="15" name="Rectangle 14"/>
+          <p:cNvPr id="17" name="Rectangle 16"/>
           <p:cNvSpPr/>
           <p:nvPr/>
         </p:nvSpPr>
@@ -37574,35 +37544,35 @@
       </p:sp>
       <p:sp>
         <p:nvSpPr>
-          <p:cNvPr id="16" name="TextBox 15"/>
-          <p:cNvSpPr txBox="1"/>
-          <p:nvPr/>
-        </p:nvSpPr>
-        <p:spPr>
-          <a:xfrm>
-            <a:off x="2038350" y="2224087"/>
-            <a:ext cx="8534400" cy="1023937"/>
-          </a:xfrm>
-          <a:prstGeom prst="rect">
-            <a:avLst/>
-          </a:prstGeom>
-          <a:noFill/>
-        </p:spPr>
-        <p:txBody>
-          <a:bodyPr wrap="square" anchor="ctr">
+          <p:cNvPr id="18" name="TextBox 17"/>
+          <p:cNvSpPr txBox="1"/>
+          <p:nvPr/>
+        </p:nvSpPr>
+        <p:spPr>
+          <a:xfrm>
+            <a:off x="2057400" y="2224087"/>
+            <a:ext cx="8496300" cy="1023937"/>
+          </a:xfrm>
+          <a:prstGeom prst="rect">
+            <a:avLst/>
+          </a:prstGeom>
+          <a:noFill/>
+        </p:spPr>
+        <p:txBody>
+          <a:bodyPr wrap="none" anchor="ctr">
             <a:spAutoFit/>
           </a:bodyPr>
           <a:lstStyle/>
           <a:p>
             <a:pPr algn="l">
               <a:lnSpc>
-                <a:spcPct val="100000"/>
-              </a:lnSpc>
-            </a:pPr>
-            <a:r>
-              <a:rPr sz="1200" b="1">
-                <a:solidFill>
-                  <a:srgbClr val="475569"/>
+                <a:spcPct val="115000"/>
+              </a:lnSpc>
+            </a:pPr>
+            <a:r>
+              <a:rPr sz="900" b="1">
+                <a:solidFill>
+                  <a:srgbClr val="0B1D3A"/>
                 </a:solidFill>
                 <a:latin typeface="PingFang SC"/>
               </a:rPr>
@@ -37613,7 +37583,7 @@
       </p:sp>
       <p:cxnSp>
         <p:nvCxnSpPr>
-          <p:cNvPr id="17" name="Connector 16"/>
+          <p:cNvPr id="19" name="Connector 18"/>
           <p:cNvCxnSpPr/>
           <p:nvPr/>
         </p:nvCxnSpPr>
@@ -37625,9 +37595,9 @@
           <a:prstGeom prst="line">
             <a:avLst/>
           </a:prstGeom>
-          <a:ln w="15240">
+          <a:ln w="17780">
             <a:solidFill>
-              <a:srgbClr val="94A3B8"/>
+              <a:srgbClr val="475569"/>
             </a:solidFill>
           </a:ln>
         </p:spPr>
@@ -37648,7 +37618,7 @@
       </p:cxnSp>
       <p:sp>
         <p:nvSpPr>
-          <p:cNvPr id="18" name="Isosceles Triangle 17"/>
+          <p:cNvPr id="20" name="Isosceles Triangle 19"/>
           <p:cNvSpPr/>
           <p:nvPr/>
         </p:nvSpPr>
@@ -37661,7 +37631,7 @@
             <a:avLst/>
           </a:prstGeom>
           <a:solidFill>
-            <a:srgbClr val="94A3B8"/>
+            <a:srgbClr val="475569"/>
           </a:solidFill>
           <a:ln>
             <a:noFill/>
@@ -37692,53 +37662,14 @@
       </p:sp>
       <p:sp>
         <p:nvSpPr>
-          <p:cNvPr id="19" name="TextBox 18"/>
-          <p:cNvSpPr txBox="1"/>
-          <p:nvPr/>
-        </p:nvSpPr>
-        <p:spPr>
-          <a:xfrm>
-            <a:off x="6248400" y="3248024"/>
-            <a:ext cx="2095500" cy="247650"/>
-          </a:xfrm>
-          <a:prstGeom prst="rect">
-            <a:avLst/>
-          </a:prstGeom>
-          <a:noFill/>
-        </p:spPr>
-        <p:txBody>
-          <a:bodyPr wrap="square" anchor="ctr">
-            <a:spAutoFit/>
-          </a:bodyPr>
-          <a:lstStyle/>
-          <a:p>
-            <a:pPr algn="l">
-              <a:lnSpc>
-                <a:spcPct val="100000"/>
-              </a:lnSpc>
-            </a:pPr>
-            <a:r>
-              <a:rPr sz="1000" b="0">
-                <a:solidFill>
-                  <a:srgbClr val="94A3B8"/>
-                </a:solidFill>
-                <a:latin typeface="PingFang SC"/>
-              </a:rPr>
-              <a:t>并行</a:t>
-            </a:r>
-          </a:p>
-        </p:txBody>
-      </p:sp>
-      <p:sp>
-        <p:nvSpPr>
-          <p:cNvPr id="20" name="Rounded Rectangle 19"/>
-          <p:cNvSpPr/>
-          <p:nvPr/>
-        </p:nvSpPr>
-        <p:spPr>
-          <a:xfrm>
-            <a:off x="1847850" y="3457574"/>
-            <a:ext cx="8877300" cy="1100137"/>
+          <p:cNvPr id="21" name="Rounded Rectangle 20"/>
+          <p:cNvSpPr/>
+          <p:nvPr/>
+        </p:nvSpPr>
+        <p:spPr>
+          <a:xfrm>
+            <a:off x="5743575" y="3286124"/>
+            <a:ext cx="704850" cy="171450"/>
           </a:xfrm>
           <a:prstGeom prst="roundRect">
             <a:avLst>
@@ -37746,45 +37677,86 @@
             </a:avLst>
           </a:prstGeom>
           <a:solidFill>
-            <a:srgbClr val="F1F5F9"/>
-          </a:solidFill>
-          <a:ln>
-            <a:noFill/>
-          </a:ln>
-          <a:effectLst/>
-        </p:spPr>
-        <p:style>
-          <a:lnRef idx="1">
-            <a:schemeClr val="accent1"/>
-          </a:lnRef>
-          <a:fillRef idx="3">
-            <a:schemeClr val="accent1"/>
-          </a:fillRef>
-          <a:effectRef idx="2">
-            <a:schemeClr val="accent1"/>
-          </a:effectRef>
-          <a:fontRef idx="minor">
-            <a:schemeClr val="lt1"/>
-          </a:fontRef>
-        </p:style>
-        <p:txBody>
-          <a:bodyPr rtlCol="0" anchor="ctr"/>
-          <a:lstStyle/>
-          <a:p>
-            <a:pPr algn="ctr"/>
-          </a:p>
-        </p:txBody>
-      </p:sp>
-      <p:sp>
-        <p:nvSpPr>
-          <p:cNvPr id="21" name="Rounded Rectangle 20"/>
-          <p:cNvSpPr/>
-          <p:nvPr/>
-        </p:nvSpPr>
-        <p:spPr>
-          <a:xfrm>
-            <a:off x="1905000" y="3495674"/>
-            <a:ext cx="8763000" cy="1023937"/>
+            <a:srgbClr val="FFFFFF"/>
+          </a:solidFill>
+          <a:ln w="12700">
+            <a:solidFill>
+              <a:srgbClr val="DDE5EE"/>
+            </a:solidFill>
+          </a:ln>
+          <a:effectLst/>
+        </p:spPr>
+        <p:style>
+          <a:lnRef idx="1">
+            <a:schemeClr val="accent1"/>
+          </a:lnRef>
+          <a:fillRef idx="3">
+            <a:schemeClr val="accent1"/>
+          </a:fillRef>
+          <a:effectRef idx="2">
+            <a:schemeClr val="accent1"/>
+          </a:effectRef>
+          <a:fontRef idx="minor">
+            <a:schemeClr val="lt1"/>
+          </a:fontRef>
+        </p:style>
+        <p:txBody>
+          <a:bodyPr rtlCol="0" anchor="ctr"/>
+          <a:lstStyle/>
+          <a:p>
+            <a:pPr algn="ctr"/>
+          </a:p>
+        </p:txBody>
+      </p:sp>
+      <p:sp>
+        <p:nvSpPr>
+          <p:cNvPr id="22" name="TextBox 21"/>
+          <p:cNvSpPr txBox="1"/>
+          <p:nvPr/>
+        </p:nvSpPr>
+        <p:spPr>
+          <a:xfrm>
+            <a:off x="5743575" y="3286124"/>
+            <a:ext cx="704850" cy="171450"/>
+          </a:xfrm>
+          <a:prstGeom prst="rect">
+            <a:avLst/>
+          </a:prstGeom>
+          <a:noFill/>
+        </p:spPr>
+        <p:txBody>
+          <a:bodyPr wrap="square" anchor="ctr">
+            <a:spAutoFit/>
+          </a:bodyPr>
+          <a:lstStyle/>
+          <a:p>
+            <a:pPr algn="ctr">
+              <a:lnSpc>
+                <a:spcPct val="100000"/>
+              </a:lnSpc>
+            </a:pPr>
+            <a:r>
+              <a:rPr sz="1100" b="1">
+                <a:solidFill>
+                  <a:srgbClr val="0B1D3A"/>
+                </a:solidFill>
+                <a:latin typeface="PingFang SC"/>
+              </a:rPr>
+              <a:t>并行</a:t>
+            </a:r>
+          </a:p>
+        </p:txBody>
+      </p:sp>
+      <p:sp>
+        <p:nvSpPr>
+          <p:cNvPr id="23" name="Rounded Rectangle 22"/>
+          <p:cNvSpPr/>
+          <p:nvPr/>
+        </p:nvSpPr>
+        <p:spPr>
+          <a:xfrm>
+            <a:off x="1847850" y="3457574"/>
+            <a:ext cx="8877300" cy="1100137"/>
           </a:xfrm>
           <a:prstGeom prst="roundRect">
             <a:avLst>
@@ -37792,6 +37764,91 @@
             </a:avLst>
           </a:prstGeom>
           <a:solidFill>
+            <a:srgbClr val="F1F5F9"/>
+          </a:solidFill>
+          <a:ln>
+            <a:noFill/>
+          </a:ln>
+          <a:effectLst/>
+        </p:spPr>
+        <p:style>
+          <a:lnRef idx="1">
+            <a:schemeClr val="accent1"/>
+          </a:lnRef>
+          <a:fillRef idx="3">
+            <a:schemeClr val="accent1"/>
+          </a:fillRef>
+          <a:effectRef idx="2">
+            <a:schemeClr val="accent1"/>
+          </a:effectRef>
+          <a:fontRef idx="minor">
+            <a:schemeClr val="lt1"/>
+          </a:fontRef>
+        </p:style>
+        <p:txBody>
+          <a:bodyPr rtlCol="0" anchor="ctr"/>
+          <a:lstStyle/>
+          <a:p>
+            <a:pPr algn="ctr"/>
+          </a:p>
+        </p:txBody>
+      </p:sp>
+      <p:sp>
+        <p:nvSpPr>
+          <p:cNvPr id="24" name="TextBox 23"/>
+          <p:cNvSpPr txBox="1"/>
+          <p:nvPr/>
+        </p:nvSpPr>
+        <p:spPr>
+          <a:xfrm>
+            <a:off x="1962150" y="3228974"/>
+            <a:ext cx="1905000" cy="209550"/>
+          </a:xfrm>
+          <a:prstGeom prst="rect">
+            <a:avLst/>
+          </a:prstGeom>
+          <a:noFill/>
+        </p:spPr>
+        <p:txBody>
+          <a:bodyPr wrap="square" anchor="ctr">
+            <a:spAutoFit/>
+          </a:bodyPr>
+          <a:lstStyle/>
+          <a:p>
+            <a:pPr algn="l">
+              <a:lnSpc>
+                <a:spcPct val="100000"/>
+              </a:lnSpc>
+            </a:pPr>
+            <a:r>
+              <a:rPr sz="1100" b="1">
+                <a:solidFill>
+                  <a:srgbClr val="8B5CF6"/>
+                </a:solidFill>
+                <a:latin typeface="PingFang SC"/>
+              </a:rPr>
+              <a:t>L3</a:t>
+            </a:r>
+          </a:p>
+        </p:txBody>
+      </p:sp>
+      <p:sp>
+        <p:nvSpPr>
+          <p:cNvPr id="25" name="Rounded Rectangle 24"/>
+          <p:cNvSpPr/>
+          <p:nvPr/>
+        </p:nvSpPr>
+        <p:spPr>
+          <a:xfrm>
+            <a:off x="1905000" y="3495674"/>
+            <a:ext cx="8763000" cy="1023937"/>
+          </a:xfrm>
+          <a:prstGeom prst="roundRect">
+            <a:avLst>
+              <a:gd name="adj" fmla="val 8000"/>
+            </a:avLst>
+          </a:prstGeom>
+          <a:solidFill>
             <a:srgbClr val="FFFFFF"/>
           </a:solidFill>
           <a:ln w="12700">
@@ -37825,7 +37882,7 @@
       </p:sp>
       <p:sp>
         <p:nvSpPr>
-          <p:cNvPr id="22" name="Rectangle 21"/>
+          <p:cNvPr id="26" name="Rectangle 25"/>
           <p:cNvSpPr/>
           <p:nvPr/>
         </p:nvSpPr>
@@ -37869,35 +37926,35 @@
       </p:sp>
       <p:sp>
         <p:nvSpPr>
-          <p:cNvPr id="23" name="TextBox 22"/>
-          <p:cNvSpPr txBox="1"/>
-          <p:nvPr/>
-        </p:nvSpPr>
-        <p:spPr>
-          <a:xfrm>
-            <a:off x="2038350" y="3495674"/>
-            <a:ext cx="8534400" cy="1023937"/>
-          </a:xfrm>
-          <a:prstGeom prst="rect">
-            <a:avLst/>
-          </a:prstGeom>
-          <a:noFill/>
-        </p:spPr>
-        <p:txBody>
-          <a:bodyPr wrap="square" anchor="ctr">
+          <p:cNvPr id="27" name="TextBox 26"/>
+          <p:cNvSpPr txBox="1"/>
+          <p:nvPr/>
+        </p:nvSpPr>
+        <p:spPr>
+          <a:xfrm>
+            <a:off x="2057400" y="3495674"/>
+            <a:ext cx="8496300" cy="1023937"/>
+          </a:xfrm>
+          <a:prstGeom prst="rect">
+            <a:avLst/>
+          </a:prstGeom>
+          <a:noFill/>
+        </p:spPr>
+        <p:txBody>
+          <a:bodyPr wrap="none" anchor="ctr">
             <a:spAutoFit/>
           </a:bodyPr>
           <a:lstStyle/>
           <a:p>
             <a:pPr algn="l">
               <a:lnSpc>
-                <a:spcPct val="100000"/>
-              </a:lnSpc>
-            </a:pPr>
-            <a:r>
-              <a:rPr sz="1200" b="1">
-                <a:solidFill>
-                  <a:srgbClr val="475569"/>
+                <a:spcPct val="115000"/>
+              </a:lnSpc>
+            </a:pPr>
+            <a:r>
+              <a:rPr sz="900" b="1">
+                <a:solidFill>
+                  <a:srgbClr val="0B1D3A"/>
                 </a:solidFill>
                 <a:latin typeface="PingFang SC"/>
               </a:rPr>
@@ -37908,7 +37965,7 @@
       </p:sp>
       <p:cxnSp>
         <p:nvCxnSpPr>
-          <p:cNvPr id="24" name="Connector 23"/>
+          <p:cNvPr id="28" name="Connector 27"/>
           <p:cNvCxnSpPr/>
           <p:nvPr/>
         </p:nvCxnSpPr>
@@ -37920,9 +37977,9 @@
           <a:prstGeom prst="line">
             <a:avLst/>
           </a:prstGeom>
-          <a:ln w="15240">
+          <a:ln w="17780">
             <a:solidFill>
-              <a:srgbClr val="94A3B8"/>
+              <a:srgbClr val="475569"/>
             </a:solidFill>
           </a:ln>
         </p:spPr>
@@ -37943,7 +38000,7 @@
       </p:cxnSp>
       <p:sp>
         <p:nvSpPr>
-          <p:cNvPr id="25" name="Isosceles Triangle 24"/>
+          <p:cNvPr id="29" name="Isosceles Triangle 28"/>
           <p:cNvSpPr/>
           <p:nvPr/>
         </p:nvSpPr>
@@ -37956,7 +38013,7 @@
             <a:avLst/>
           </a:prstGeom>
           <a:solidFill>
-            <a:srgbClr val="94A3B8"/>
+            <a:srgbClr val="475569"/>
           </a:solidFill>
           <a:ln>
             <a:noFill/>
@@ -37987,53 +38044,14 @@
       </p:sp>
       <p:sp>
         <p:nvSpPr>
-          <p:cNvPr id="26" name="TextBox 25"/>
-          <p:cNvSpPr txBox="1"/>
-          <p:nvPr/>
-        </p:nvSpPr>
-        <p:spPr>
-          <a:xfrm>
-            <a:off x="6248400" y="4519611"/>
-            <a:ext cx="2095500" cy="247650"/>
-          </a:xfrm>
-          <a:prstGeom prst="rect">
-            <a:avLst/>
-          </a:prstGeom>
-          <a:noFill/>
-        </p:spPr>
-        <p:txBody>
-          <a:bodyPr wrap="square" anchor="ctr">
-            <a:spAutoFit/>
-          </a:bodyPr>
-          <a:lstStyle/>
-          <a:p>
-            <a:pPr algn="l">
-              <a:lnSpc>
-                <a:spcPct val="100000"/>
-              </a:lnSpc>
-            </a:pPr>
-            <a:r>
-              <a:rPr sz="1000" b="0">
-                <a:solidFill>
-                  <a:srgbClr val="94A3B8"/>
-                </a:solidFill>
-                <a:latin typeface="PingFang SC"/>
-              </a:rPr>
-              <a:t>成文</a:t>
-            </a:r>
-          </a:p>
-        </p:txBody>
-      </p:sp>
-      <p:sp>
-        <p:nvSpPr>
-          <p:cNvPr id="27" name="Rounded Rectangle 26"/>
-          <p:cNvSpPr/>
-          <p:nvPr/>
-        </p:nvSpPr>
-        <p:spPr>
-          <a:xfrm>
-            <a:off x="1847850" y="4729161"/>
-            <a:ext cx="8877300" cy="1100137"/>
+          <p:cNvPr id="30" name="Rounded Rectangle 29"/>
+          <p:cNvSpPr/>
+          <p:nvPr/>
+        </p:nvSpPr>
+        <p:spPr>
+          <a:xfrm>
+            <a:off x="5743575" y="4557711"/>
+            <a:ext cx="704850" cy="171450"/>
           </a:xfrm>
           <a:prstGeom prst="roundRect">
             <a:avLst>
@@ -38041,45 +38059,86 @@
             </a:avLst>
           </a:prstGeom>
           <a:solidFill>
-            <a:srgbClr val="F1F5F9"/>
-          </a:solidFill>
-          <a:ln>
-            <a:noFill/>
-          </a:ln>
-          <a:effectLst/>
-        </p:spPr>
-        <p:style>
-          <a:lnRef idx="1">
-            <a:schemeClr val="accent1"/>
-          </a:lnRef>
-          <a:fillRef idx="3">
-            <a:schemeClr val="accent1"/>
-          </a:fillRef>
-          <a:effectRef idx="2">
-            <a:schemeClr val="accent1"/>
-          </a:effectRef>
-          <a:fontRef idx="minor">
-            <a:schemeClr val="lt1"/>
-          </a:fontRef>
-        </p:style>
-        <p:txBody>
-          <a:bodyPr rtlCol="0" anchor="ctr"/>
-          <a:lstStyle/>
-          <a:p>
-            <a:pPr algn="ctr"/>
-          </a:p>
-        </p:txBody>
-      </p:sp>
-      <p:sp>
-        <p:nvSpPr>
-          <p:cNvPr id="28" name="Rounded Rectangle 27"/>
-          <p:cNvSpPr/>
-          <p:nvPr/>
-        </p:nvSpPr>
-        <p:spPr>
-          <a:xfrm>
-            <a:off x="1905000" y="4767261"/>
-            <a:ext cx="8763000" cy="1023937"/>
+            <a:srgbClr val="FFFFFF"/>
+          </a:solidFill>
+          <a:ln w="12700">
+            <a:solidFill>
+              <a:srgbClr val="DDE5EE"/>
+            </a:solidFill>
+          </a:ln>
+          <a:effectLst/>
+        </p:spPr>
+        <p:style>
+          <a:lnRef idx="1">
+            <a:schemeClr val="accent1"/>
+          </a:lnRef>
+          <a:fillRef idx="3">
+            <a:schemeClr val="accent1"/>
+          </a:fillRef>
+          <a:effectRef idx="2">
+            <a:schemeClr val="accent1"/>
+          </a:effectRef>
+          <a:fontRef idx="minor">
+            <a:schemeClr val="lt1"/>
+          </a:fontRef>
+        </p:style>
+        <p:txBody>
+          <a:bodyPr rtlCol="0" anchor="ctr"/>
+          <a:lstStyle/>
+          <a:p>
+            <a:pPr algn="ctr"/>
+          </a:p>
+        </p:txBody>
+      </p:sp>
+      <p:sp>
+        <p:nvSpPr>
+          <p:cNvPr id="31" name="TextBox 30"/>
+          <p:cNvSpPr txBox="1"/>
+          <p:nvPr/>
+        </p:nvSpPr>
+        <p:spPr>
+          <a:xfrm>
+            <a:off x="5743575" y="4557711"/>
+            <a:ext cx="704850" cy="171450"/>
+          </a:xfrm>
+          <a:prstGeom prst="rect">
+            <a:avLst/>
+          </a:prstGeom>
+          <a:noFill/>
+        </p:spPr>
+        <p:txBody>
+          <a:bodyPr wrap="square" anchor="ctr">
+            <a:spAutoFit/>
+          </a:bodyPr>
+          <a:lstStyle/>
+          <a:p>
+            <a:pPr algn="ctr">
+              <a:lnSpc>
+                <a:spcPct val="100000"/>
+              </a:lnSpc>
+            </a:pPr>
+            <a:r>
+              <a:rPr sz="1100" b="1">
+                <a:solidFill>
+                  <a:srgbClr val="0B1D3A"/>
+                </a:solidFill>
+                <a:latin typeface="PingFang SC"/>
+              </a:rPr>
+              <a:t>成文</a:t>
+            </a:r>
+          </a:p>
+        </p:txBody>
+      </p:sp>
+      <p:sp>
+        <p:nvSpPr>
+          <p:cNvPr id="32" name="Rounded Rectangle 31"/>
+          <p:cNvSpPr/>
+          <p:nvPr/>
+        </p:nvSpPr>
+        <p:spPr>
+          <a:xfrm>
+            <a:off x="1847850" y="4729161"/>
+            <a:ext cx="8877300" cy="1100137"/>
           </a:xfrm>
           <a:prstGeom prst="roundRect">
             <a:avLst>
@@ -38087,6 +38146,91 @@
             </a:avLst>
           </a:prstGeom>
           <a:solidFill>
+            <a:srgbClr val="F1F5F9"/>
+          </a:solidFill>
+          <a:ln>
+            <a:noFill/>
+          </a:ln>
+          <a:effectLst/>
+        </p:spPr>
+        <p:style>
+          <a:lnRef idx="1">
+            <a:schemeClr val="accent1"/>
+          </a:lnRef>
+          <a:fillRef idx="3">
+            <a:schemeClr val="accent1"/>
+          </a:fillRef>
+          <a:effectRef idx="2">
+            <a:schemeClr val="accent1"/>
+          </a:effectRef>
+          <a:fontRef idx="minor">
+            <a:schemeClr val="lt1"/>
+          </a:fontRef>
+        </p:style>
+        <p:txBody>
+          <a:bodyPr rtlCol="0" anchor="ctr"/>
+          <a:lstStyle/>
+          <a:p>
+            <a:pPr algn="ctr"/>
+          </a:p>
+        </p:txBody>
+      </p:sp>
+      <p:sp>
+        <p:nvSpPr>
+          <p:cNvPr id="33" name="TextBox 32"/>
+          <p:cNvSpPr txBox="1"/>
+          <p:nvPr/>
+        </p:nvSpPr>
+        <p:spPr>
+          <a:xfrm>
+            <a:off x="1962150" y="4500561"/>
+            <a:ext cx="1905000" cy="209550"/>
+          </a:xfrm>
+          <a:prstGeom prst="rect">
+            <a:avLst/>
+          </a:prstGeom>
+          <a:noFill/>
+        </p:spPr>
+        <p:txBody>
+          <a:bodyPr wrap="square" anchor="ctr">
+            <a:spAutoFit/>
+          </a:bodyPr>
+          <a:lstStyle/>
+          <a:p>
+            <a:pPr algn="l">
+              <a:lnSpc>
+                <a:spcPct val="100000"/>
+              </a:lnSpc>
+            </a:pPr>
+            <a:r>
+              <a:rPr sz="1100" b="1">
+                <a:solidFill>
+                  <a:srgbClr val="F59E0B"/>
+                </a:solidFill>
+                <a:latin typeface="PingFang SC"/>
+              </a:rPr>
+              <a:t>L4</a:t>
+            </a:r>
+          </a:p>
+        </p:txBody>
+      </p:sp>
+      <p:sp>
+        <p:nvSpPr>
+          <p:cNvPr id="34" name="Rounded Rectangle 33"/>
+          <p:cNvSpPr/>
+          <p:nvPr/>
+        </p:nvSpPr>
+        <p:spPr>
+          <a:xfrm>
+            <a:off x="1905000" y="4767261"/>
+            <a:ext cx="8763000" cy="1023937"/>
+          </a:xfrm>
+          <a:prstGeom prst="roundRect">
+            <a:avLst>
+              <a:gd name="adj" fmla="val 8000"/>
+            </a:avLst>
+          </a:prstGeom>
+          <a:solidFill>
             <a:srgbClr val="FFFFFF"/>
           </a:solidFill>
           <a:ln w="12700">
@@ -38120,7 +38264,7 @@
       </p:sp>
       <p:sp>
         <p:nvSpPr>
-          <p:cNvPr id="29" name="Rectangle 28"/>
+          <p:cNvPr id="35" name="Rectangle 34"/>
           <p:cNvSpPr/>
           <p:nvPr/>
         </p:nvSpPr>
@@ -38164,46 +38308,46 @@
       </p:sp>
       <p:sp>
         <p:nvSpPr>
-          <p:cNvPr id="30" name="TextBox 29"/>
-          <p:cNvSpPr txBox="1"/>
-          <p:nvPr/>
-        </p:nvSpPr>
-        <p:spPr>
-          <a:xfrm>
-            <a:off x="2038350" y="4767261"/>
-            <a:ext cx="8534400" cy="1023937"/>
-          </a:xfrm>
-          <a:prstGeom prst="rect">
-            <a:avLst/>
-          </a:prstGeom>
-          <a:noFill/>
-        </p:spPr>
-        <p:txBody>
-          <a:bodyPr wrap="square" anchor="ctr">
+          <p:cNvPr id="36" name="TextBox 35"/>
+          <p:cNvSpPr txBox="1"/>
+          <p:nvPr/>
+        </p:nvSpPr>
+        <p:spPr>
+          <a:xfrm>
+            <a:off x="2057400" y="4767261"/>
+            <a:ext cx="8496300" cy="1023937"/>
+          </a:xfrm>
+          <a:prstGeom prst="rect">
+            <a:avLst/>
+          </a:prstGeom>
+          <a:noFill/>
+        </p:spPr>
+        <p:txBody>
+          <a:bodyPr wrap="none" anchor="ctr">
             <a:spAutoFit/>
           </a:bodyPr>
           <a:lstStyle/>
           <a:p>
             <a:pPr algn="l">
               <a:lnSpc>
-                <a:spcPct val="100000"/>
-              </a:lnSpc>
-            </a:pPr>
-            <a:r>
-              <a:rPr sz="1200" b="1">
-                <a:solidFill>
-                  <a:srgbClr val="475569"/>
-                </a:solidFill>
-                <a:latin typeface="PingFang SC"/>
-              </a:rPr>
-              <a:t>产出:Markdown 报告+证据链|examples/capstone/deep_research 已可运行</a:t>
-            </a:r>
-          </a:p>
-        </p:txBody>
-      </p:sp>
-      <p:sp>
-        <p:nvSpPr>
-          <p:cNvPr id="31" name="TextBox 30"/>
+                <a:spcPct val="115000"/>
+              </a:lnSpc>
+            </a:pPr>
+            <a:r>
+              <a:rPr sz="1100" b="1">
+                <a:solidFill>
+                  <a:srgbClr val="0B1D3A"/>
+                </a:solidFill>
+                <a:latin typeface="PingFang SC"/>
+              </a:rPr>
+              <a:t>产出:Markdown 报告+证据链</a:t>
+            </a:r>
+          </a:p>
+        </p:txBody>
+      </p:sp>
+      <p:sp>
+        <p:nvSpPr>
+          <p:cNvPr id="37" name="TextBox 36"/>
           <p:cNvSpPr txBox="1"/>
           <p:nvPr/>
         </p:nvSpPr>
@@ -38242,7 +38386,7 @@
       </p:sp>
       <p:sp>
         <p:nvSpPr>
-          <p:cNvPr id="32" name="TextBox 31"/>
+          <p:cNvPr id="38" name="TextBox 37"/>
           <p:cNvSpPr txBox="1"/>
           <p:nvPr/>
         </p:nvSpPr>

--- a/03-课件PPT/讲次版/第7章-2-讲次 7-2 · 高阶案例深度研究与软件工厂.pptx
+++ b/03-课件PPT/讲次版/第7章-2-讲次 7-2 · 高阶案例深度研究与软件工厂.pptx
@@ -37177,7 +37177,7 @@
           <a:noFill/>
         </p:spPr>
         <p:txBody>
-          <a:bodyPr wrap="none" anchor="ctr">
+          <a:bodyPr wrap="square" anchor="ctr">
             <a:spAutoFit/>
           </a:bodyPr>
           <a:lstStyle/>
@@ -37188,7 +37188,7 @@
               </a:lnSpc>
             </a:pPr>
             <a:r>
-              <a:rPr sz="1100" b="1">
+              <a:rPr sz="1300" b="1">
                 <a:solidFill>
                   <a:srgbClr val="0B1D3A"/>
                 </a:solidFill>
@@ -37559,7 +37559,7 @@
           <a:noFill/>
         </p:spPr>
         <p:txBody>
-          <a:bodyPr wrap="none" anchor="ctr">
+          <a:bodyPr wrap="square" anchor="ctr">
             <a:spAutoFit/>
           </a:bodyPr>
           <a:lstStyle/>
@@ -37570,7 +37570,7 @@
               </a:lnSpc>
             </a:pPr>
             <a:r>
-              <a:rPr sz="900" b="1">
+              <a:rPr sz="1300" b="1">
                 <a:solidFill>
                   <a:srgbClr val="0B1D3A"/>
                 </a:solidFill>
@@ -37941,7 +37941,7 @@
           <a:noFill/>
         </p:spPr>
         <p:txBody>
-          <a:bodyPr wrap="none" anchor="ctr">
+          <a:bodyPr wrap="square" anchor="ctr">
             <a:spAutoFit/>
           </a:bodyPr>
           <a:lstStyle/>
@@ -37952,7 +37952,7 @@
               </a:lnSpc>
             </a:pPr>
             <a:r>
-              <a:rPr sz="900" b="1">
+              <a:rPr sz="1300" b="1">
                 <a:solidFill>
                   <a:srgbClr val="0B1D3A"/>
                 </a:solidFill>
@@ -38323,7 +38323,7 @@
           <a:noFill/>
         </p:spPr>
         <p:txBody>
-          <a:bodyPr wrap="none" anchor="ctr">
+          <a:bodyPr wrap="square" anchor="ctr">
             <a:spAutoFit/>
           </a:bodyPr>
           <a:lstStyle/>
@@ -38334,7 +38334,7 @@
               </a:lnSpc>
             </a:pPr>
             <a:r>
-              <a:rPr sz="1100" b="1">
+              <a:rPr sz="1300" b="1">
                 <a:solidFill>
                   <a:srgbClr val="0B1D3A"/>
                 </a:solidFill>
